--- a/S1-CL2-Cloud-Disaster-Recovery/assessments/AT1/AT1-exemplar-presentation.pptx
+++ b/S1-CL2-Cloud-Disaster-Recovery/assessments/AT1/AT1-exemplar-presentation.pptx
@@ -3270,7 +3270,7 @@
                 </a:solidFill>
                 <a:latin typeface="Source Sans 3"/>
               </a:rPr>
-              <a:t>YAT LMS Global Expansion</a:t>
+              <a:t>YAT Website Global Expansion</a:t>
             </a:r>
           </a:p>
         </p:txBody>
@@ -3522,7 +3522,7 @@
                 </a:solidFill>
                 <a:latin typeface="Source Sans 3"/>
               </a:rPr>
-              <a:t>Recovery is into a second Australian region — student data never leaves the country, even during a disaster.</a:t>
+              <a:t>Recovery is into a second Australian region — the website's Australian-held data never leaves the country, even during a disaster.</a:t>
             </a:r>
           </a:p>
           <a:p>
@@ -4054,7 +4054,7 @@
                 </a:solidFill>
                 <a:latin typeface="Source Sans 3"/>
               </a:rPr>
-              <a:t>Design approved → Phase 2 implementation (the Deployment Report).</a:t>
+              <a:t>Approved → lodged and registered for change management → Phase 2 implementation (the Deployment Report).</a:t>
             </a:r>
           </a:p>
         </p:txBody>
@@ -4203,7 +4203,7 @@
                 </a:solidFill>
                 <a:latin typeface="Source Sans 3"/>
               </a:rPr>
-              <a:t>MTS Consulting  ·  YAT LMS Global Expansion</a:t>
+              <a:t>MTS Consulting  ·  YAT Website Global Expansion</a:t>
             </a:r>
           </a:p>
         </p:txBody>
@@ -4502,7 +4502,7 @@
                 </a:solidFill>
                 <a:latin typeface="Source Sans 3"/>
               </a:rPr>
-              <a:t>Web-scale design — serving a global cohort</a:t>
+              <a:t>Web-scale design — serving a global public audience</a:t>
             </a:r>
           </a:p>
           <a:p>
@@ -4857,7 +4857,7 @@
                 </a:solidFill>
                 <a:latin typeface="Source Sans 3"/>
               </a:rPr>
-              <a:t>YAT's GIFT City partnership takes the LMS global — a partner institution now depends on it.</a:t>
+              <a:t>YAT's GIFT City partnership makes the public website the global enrolment front-door — a partner institution's intake now depends on it.</a:t>
             </a:r>
           </a:p>
           <a:p>
@@ -4882,7 +4882,7 @@
                 </a:solidFill>
                 <a:latin typeface="Source Sans 3"/>
               </a:rPr>
-              <a:t>That means the LMS must now: serve a global user base, survive the loss of a whole region, and be provisioned as code.</a:t>
+              <a:t>That means the website must now: serve a global, anonymous public audience, survive the loss of a whole region, and be provisioned as code.</a:t>
             </a:r>
           </a:p>
           <a:p>
@@ -4907,7 +4907,7 @@
                 </a:solidFill>
                 <a:latin typeface="Source Sans 3"/>
               </a:rPr>
-              <a:t>Today's design is single-region high availability — right for one Australian cohort, not for this.</a:t>
+              <a:t>Today's design is single-region high availability — right for the Australian audience, not for this.</a:t>
             </a:r>
           </a:p>
           <a:p>
@@ -5137,7 +5137,7 @@
                 </a:solidFill>
                 <a:latin typeface="Source Sans 3"/>
               </a:rPr>
-              <a:t>Solution Design (Part A) — scale the web application for a global cohort, plus an audit-log microservice.</a:t>
+              <a:t>Solution Design (Part A) — scale the website for a global public audience, plus an audit-log microservice.</a:t>
             </a:r>
           </a:p>
           <a:p>
@@ -5162,7 +5162,7 @@
                 </a:solidFill>
                 <a:latin typeface="Source Sans 3"/>
               </a:rPr>
-              <a:t>Disaster Recovery Plan (Part B) — recover the LMS if the primary region is lost.</a:t>
+              <a:t>Disaster Recovery Plan (Part B) — recover the website if the primary region is lost.</a:t>
             </a:r>
           </a:p>
           <a:p>
@@ -5325,7 +5325,7 @@
                 </a:solidFill>
                 <a:latin typeface="Source Sans 3"/>
               </a:rPr>
-              <a:t>Web-scale design — serving a global cohort</a:t>
+              <a:t>Web-scale design — serving a global public audience</a:t>
             </a:r>
           </a:p>
         </p:txBody>
@@ -5417,7 +5417,7 @@
                 </a:solidFill>
                 <a:latin typeface="Source Sans 3"/>
               </a:rPr>
-              <a:t>CloudFront edge delivery + Route 53 latency routing — India users are served from the nearest edge, not Sydney.</a:t>
+              <a:t>CloudFront edge delivery + Route 53 latency routing — anonymous India visitors served from the nearest edge, not Sydney; fast and search-discoverable.</a:t>
             </a:r>
           </a:p>
           <a:p>
@@ -5442,7 +5442,7 @@
                 </a:solidFill>
                 <a:latin typeface="Source Sans 3"/>
               </a:rPr>
-              <a:t>ElastiCache caches sessions and hot reads, absorbing a larger, spikier load off the database.</a:t>
+              <a:t>ElastiCache caches sessions and hot reads, absorbing a larger, spikier public load off the database.</a:t>
             </a:r>
           </a:p>
           <a:p>
@@ -5492,7 +5492,7 @@
                 </a:solidFill>
                 <a:latin typeface="Source Sans 3"/>
               </a:rPr>
-              <a:t>Availability and security are maintained — WAF at the edge, the origin locked to CloudFront, TLS throughout.</a:t>
+              <a:t>Public exposure handled at the edge — WAF for web exploits, Shield + rate / bot rules for scraping and DDoS, origin locked to CloudFront, TLS throughout.</a:t>
             </a:r>
           </a:p>
         </p:txBody>
@@ -5747,7 +5747,7 @@
                 </a:solidFill>
                 <a:latin typeface="Source Sans 3"/>
               </a:rPr>
-              <a:t>Loosely coupled — the LMS only calls a webhook; the service can change independently behind it.</a:t>
+              <a:t>Loosely coupled — the website only calls a webhook; the service can change independently behind it.</a:t>
             </a:r>
           </a:p>
           <a:p>
@@ -5772,7 +5772,7 @@
                 </a:solidFill>
                 <a:latin typeface="Source Sans 3"/>
               </a:rPr>
-              <a:t>The same generic engine serves the Accounting practice project — only the payload differs.</a:t>
+              <a:t>The contract is generic — any event producer that meets it can reuse the same service; only the payload differs.</a:t>
             </a:r>
           </a:p>
         </p:txBody>
@@ -6254,7 +6254,7 @@
                 </a:solidFill>
                 <a:latin typeface="Source Sans 3"/>
               </a:rPr>
-              <a:t>RTO ≤ 4 hours — the LMS is back in service within four hours of an incident being declared.</a:t>
+              <a:t>RTO ≤ 4 hours — the website is back in service within four hours of an incident being declared.</a:t>
             </a:r>
           </a:p>
           <a:p>
@@ -6534,7 +6534,7 @@
                 </a:solidFill>
                 <a:latin typeface="Source Sans 3"/>
               </a:rPr>
-              <a:t>The runbook: detect → declare → rebuild from code → restore the database → verify → cut DNS over → confirm.</a:t>
+              <a:t>The runbook: detect → declare → rebuild from code → restore the database → verify → cut CDN / DNS over → confirm.</a:t>
             </a:r>
           </a:p>
           <a:p>
